--- a/Бахромов_презентация_TOP2_16_слайдов.pptx
+++ b/Бахромов_презентация_TOP2_16_слайдов.pptx
@@ -23751,6 +23751,333 @@
               <a:latin typeface="Times New Roman" panose="02020603050405020304" pitchFamily="18" charset="0"/>
               <a:cs typeface="Times New Roman" panose="02020603050405020304" pitchFamily="18" charset="0"/>
             </a:endParaRPr>
+          </a:p>
+        </p:txBody>
+      </p:sp>
+      <p:sp>
+        <p:nvSpPr>
+          <p:cNvPr id="210" name="ампликон-подпись"/>
+          <p:cNvSpPr txBox="1"/>
+          <p:nvPr/>
+        </p:nvSpPr>
+        <p:spPr>
+          <a:xfrm>
+            <a:off x="2400000" y="4460000"/>
+            <a:ext cx="7400000" cy="340000"/>
+          </a:xfrm>
+          <a:prstGeom prst="rect">
+            <a:avLst/>
+          </a:prstGeom>
+          <a:noFill/>
+        </p:spPr>
+        <p:txBody>
+          <a:bodyPr wrap="square" rtlCol="0" anchor="b">
+            <a:normAutofit/>
+          </a:bodyPr>
+          <a:lstStyle/>
+          <a:p>
+            <a:pPr marL="0" indent="0" algn="ctr">
+              <a:spcBef>
+                <a:spcPts val="0"/>
+              </a:spcBef>
+              <a:buNone/>
+            </a:pPr>
+            <a:r>
+              <a:rPr lang="ru-RU" altLang="en-US" sz="1400" b="1" dirty="0">
+                <a:solidFill>
+                  <a:srgbClr val="1F3864"/>
+                </a:solidFill>
+                <a:latin typeface="Times New Roman" panose="02020603050405020304" pitchFamily="18" charset="0"/>
+                <a:cs typeface="Times New Roman" panose="02020603050405020304" pitchFamily="18" charset="0"/>
+              </a:rPr>
+              <a:t>Ампликон ≈ 150 п.н.</a:t>
+            </a:r>
+          </a:p>
+        </p:txBody>
+      </p:sp>
+      <p:cxnSp>
+        <p:nvCxnSpPr>
+          <p:cNvPr id="211" name="amplicon"/>
+          <p:cNvCxnSpPr/>
+          <p:nvPr/>
+        </p:nvCxnSpPr>
+        <p:spPr>
+          <a:xfrm>
+            <a:off x="2400000" y="4860000"/>
+            <a:ext cx="7400000" cy="1"/>
+          </a:xfrm>
+          <a:prstGeom prst="line">
+            <a:avLst/>
+          </a:prstGeom>
+          <a:ln w="22225">
+            <a:solidFill>
+              <a:srgbClr val="1F3864"/>
+            </a:solidFill>
+            <a:headEnd type="triangle" w="med" len="med"/>
+            <a:tailEnd type="triangle" w="med" len="med"/>
+          </a:ln>
+        </p:spPr>
+      </p:cxnSp>
+      <p:sp>
+        <p:nvSpPr>
+          <p:cNvPr id="212" name="primer"/>
+          <p:cNvSpPr/>
+          <p:nvPr/>
+        </p:nvSpPr>
+        <p:spPr>
+          <a:xfrm>
+            <a:off x="2400000" y="5000000"/>
+            <a:ext cx="2100000" cy="300000"/>
+          </a:xfrm>
+          <a:prstGeom prst="rightArrow">
+            <a:avLst>
+              <a:gd name="adj1" fmla="val 50000"/>
+              <a:gd name="adj2" fmla="val 40000"/>
+            </a:avLst>
+          </a:prstGeom>
+          <a:solidFill>
+            <a:srgbClr val="1F6FB2"/>
+          </a:solidFill>
+        </p:spPr>
+        <p:txBody>
+          <a:bodyPr wrap="square" anchor="ctr" lIns="36576" rIns="36576" tIns="9144" bIns="9144">
+            <a:normAutofit/>
+          </a:bodyPr>
+          <a:lstStyle/>
+          <a:p>
+            <a:pPr marL="0" indent="0" algn="ctr">
+              <a:spcBef>
+                <a:spcPts val="0"/>
+              </a:spcBef>
+              <a:buNone/>
+            </a:pPr>
+            <a:r>
+              <a:rPr lang="ru-RU" altLang="en-US" sz="1100" b="1" dirty="0">
+                <a:solidFill>
+                  <a:srgbClr val="FFFFFF"/>
+                </a:solidFill>
+                <a:latin typeface="Times New Roman" panose="02020603050405020304" pitchFamily="18" charset="0"/>
+                <a:cs typeface="Times New Roman" panose="02020603050405020304" pitchFamily="18" charset="0"/>
+              </a:rPr>
+              <a:t>Forward (прямой) →</a:t>
+            </a:r>
+          </a:p>
+        </p:txBody>
+      </p:sp>
+      <p:sp>
+        <p:nvSpPr>
+          <p:cNvPr id="213" name="template"/>
+          <p:cNvSpPr/>
+          <p:nvPr/>
+        </p:nvSpPr>
+        <p:spPr>
+          <a:xfrm>
+            <a:off x="900000" y="5380000"/>
+            <a:ext cx="10400000" cy="300000"/>
+          </a:xfrm>
+          <a:prstGeom prst="rect">
+            <a:avLst/>
+          </a:prstGeom>
+          <a:solidFill>
+            <a:srgbClr val="D9D9D9"/>
+          </a:solidFill>
+          <a:ln w="9525">
+            <a:solidFill>
+              <a:srgbClr val="A6A6A6"/>
+            </a:solidFill>
+          </a:ln>
+        </p:spPr>
+        <p:txBody>
+          <a:bodyPr wrap="square" anchor="ctr">
+            <a:normAutofit/>
+          </a:bodyPr>
+          <a:lstStyle/>
+          <a:p>
+            <a:pPr marL="0" indent="0" algn="ctr">
+              <a:spcBef>
+                <a:spcPts val="0"/>
+              </a:spcBef>
+              <a:buNone/>
+            </a:pPr>
+            <a:r>
+              <a:rPr lang="ru-RU" altLang="en-US" sz="1300" b="1" dirty="0">
+                <a:solidFill>
+                  <a:srgbClr val="1F1F1F"/>
+                </a:solidFill>
+                <a:latin typeface="Times New Roman" panose="02020603050405020304" pitchFamily="18" charset="0"/>
+                <a:cs typeface="Times New Roman" panose="02020603050405020304" pitchFamily="18" charset="0"/>
+              </a:rPr>
+              <a:t>Матрица — ген TOP2A (экзонный стык)</a:t>
+            </a:r>
+          </a:p>
+        </p:txBody>
+      </p:sp>
+      <p:sp>
+        <p:nvSpPr>
+          <p:cNvPr id="214" name="primer"/>
+          <p:cNvSpPr/>
+          <p:nvPr/>
+        </p:nvSpPr>
+        <p:spPr>
+          <a:xfrm>
+            <a:off x="7700000" y="5760000"/>
+            <a:ext cx="2100000" cy="300000"/>
+          </a:xfrm>
+          <a:prstGeom prst="leftArrow">
+            <a:avLst>
+              <a:gd name="adj1" fmla="val 50000"/>
+              <a:gd name="adj2" fmla="val 40000"/>
+            </a:avLst>
+          </a:prstGeom>
+          <a:solidFill>
+            <a:srgbClr val="2E9E8F"/>
+          </a:solidFill>
+        </p:spPr>
+        <p:txBody>
+          <a:bodyPr wrap="square" anchor="ctr" lIns="36576" rIns="36576" tIns="9144" bIns="9144">
+            <a:normAutofit/>
+          </a:bodyPr>
+          <a:lstStyle/>
+          <a:p>
+            <a:pPr marL="0" indent="0" algn="ctr">
+              <a:spcBef>
+                <a:spcPts val="0"/>
+              </a:spcBef>
+              <a:buNone/>
+            </a:pPr>
+            <a:r>
+              <a:rPr lang="ru-RU" altLang="en-US" sz="1100" b="1" dirty="0">
+                <a:solidFill>
+                  <a:srgbClr val="FFFFFF"/>
+                </a:solidFill>
+                <a:latin typeface="Times New Roman" panose="02020603050405020304" pitchFamily="18" charset="0"/>
+                <a:cs typeface="Times New Roman" panose="02020603050405020304" pitchFamily="18" charset="0"/>
+              </a:rPr>
+              <a:t>← Reverse (обратный)</a:t>
+            </a:r>
+          </a:p>
+        </p:txBody>
+      </p:sp>
+      <p:sp>
+        <p:nvSpPr>
+          <p:cNvPr id="215" name="5prime"/>
+          <p:cNvSpPr txBox="1"/>
+          <p:nvPr/>
+        </p:nvSpPr>
+        <p:spPr>
+          <a:xfrm>
+            <a:off x="560000" y="5380000"/>
+            <a:ext cx="320000" cy="300000"/>
+          </a:xfrm>
+          <a:prstGeom prst="rect">
+            <a:avLst/>
+          </a:prstGeom>
+          <a:noFill/>
+        </p:spPr>
+        <p:txBody>
+          <a:bodyPr wrap="square" rtlCol="0" anchor="ctr">
+            <a:normAutofit/>
+          </a:bodyPr>
+          <a:lstStyle/>
+          <a:p>
+            <a:pPr marL="0" indent="0" algn="ctr">
+              <a:spcBef>
+                <a:spcPts val="0"/>
+              </a:spcBef>
+              <a:buNone/>
+            </a:pPr>
+            <a:r>
+              <a:rPr lang="ru-RU" altLang="en-US" sz="1100" b="1" dirty="0">
+                <a:solidFill>
+                  <a:srgbClr val="595959"/>
+                </a:solidFill>
+                <a:latin typeface="Times New Roman" panose="02020603050405020304" pitchFamily="18" charset="0"/>
+                <a:cs typeface="Times New Roman" panose="02020603050405020304" pitchFamily="18" charset="0"/>
+              </a:rPr>
+              <a:t>5′</a:t>
+            </a:r>
+          </a:p>
+        </p:txBody>
+      </p:sp>
+      <p:sp>
+        <p:nvSpPr>
+          <p:cNvPr id="216" name="3prime"/>
+          <p:cNvSpPr txBox="1"/>
+          <p:nvPr/>
+        </p:nvSpPr>
+        <p:spPr>
+          <a:xfrm>
+            <a:off x="11320000" y="5380000"/>
+            <a:ext cx="340000" cy="300000"/>
+          </a:xfrm>
+          <a:prstGeom prst="rect">
+            <a:avLst/>
+          </a:prstGeom>
+          <a:noFill/>
+        </p:spPr>
+        <p:txBody>
+          <a:bodyPr wrap="square" rtlCol="0" anchor="ctr">
+            <a:normAutofit/>
+          </a:bodyPr>
+          <a:lstStyle/>
+          <a:p>
+            <a:pPr marL="0" indent="0" algn="ctr">
+              <a:spcBef>
+                <a:spcPts val="0"/>
+              </a:spcBef>
+              <a:buNone/>
+            </a:pPr>
+            <a:r>
+              <a:rPr lang="ru-RU" altLang="en-US" sz="1100" b="1" dirty="0">
+                <a:solidFill>
+                  <a:srgbClr val="595959"/>
+                </a:solidFill>
+                <a:latin typeface="Times New Roman" panose="02020603050405020304" pitchFamily="18" charset="0"/>
+                <a:cs typeface="Times New Roman" panose="02020603050405020304" pitchFamily="18" charset="0"/>
+              </a:rPr>
+              <a:t>3′</a:t>
+            </a:r>
+          </a:p>
+        </p:txBody>
+      </p:sp>
+      <p:sp>
+        <p:nvSpPr>
+          <p:cNvPr id="217" name="рис-подпись"/>
+          <p:cNvSpPr txBox="1"/>
+          <p:nvPr/>
+        </p:nvSpPr>
+        <p:spPr>
+          <a:xfrm>
+            <a:off x="900000" y="6060000"/>
+            <a:ext cx="10400000" cy="320000"/>
+          </a:xfrm>
+          <a:prstGeom prst="rect">
+            <a:avLst/>
+          </a:prstGeom>
+          <a:noFill/>
+        </p:spPr>
+        <p:txBody>
+          <a:bodyPr wrap="square" rtlCol="0" anchor="t">
+            <a:normAutofit/>
+          </a:bodyPr>
+          <a:lstStyle/>
+          <a:p>
+            <a:pPr marL="0" indent="0" algn="ctr">
+              <a:spcBef>
+                <a:spcPts val="0"/>
+              </a:spcBef>
+              <a:buNone/>
+            </a:pPr>
+            <a:r>
+              <a:rPr lang="ru-RU" altLang="en-US" sz="1200" i="1" dirty="0">
+                <a:solidFill>
+                  <a:srgbClr val="595959"/>
+                </a:solidFill>
+                <a:latin typeface="Times New Roman" panose="02020603050405020304" pitchFamily="18" charset="0"/>
+                <a:cs typeface="Times New Roman" panose="02020603050405020304" pitchFamily="18" charset="0"/>
+              </a:rPr>
+              <a:t>Схема отжига праймеров на матрице (визуализация в SnapGene)</a:t>
+            </a:r>
           </a:p>
         </p:txBody>
       </p:sp>

--- a/Бахромов_презентация_TOP2_16_слайдов.pptx
+++ b/Бахромов_презентация_TOP2_16_слайдов.pptx
@@ -27410,11 +27410,11 @@
               <a:t>Источник: </a:t>
             </a:r>
             <a:r>
-              <a:rPr lang="en-US" altLang="ru-RU" sz="1400">
+              <a:rPr lang="ru-RU" altLang="en-US" sz="1400">
                 <a:latin typeface="Times New Roman" panose="02020603050405020304" pitchFamily="18" charset="0"/>
                 <a:cs typeface="Times New Roman" panose="02020603050405020304" pitchFamily="18" charset="0"/>
               </a:rPr>
-              <a:t>https://atdbio.com/nucleic-acids-book/Solid-phase-oligonucleotide-synthesis</a:t>
+              <a:t>Твердофазный фосфорамидитный синтез олигонуклеотидов</a:t>
             </a:r>
             <a:endParaRPr lang="ru-RU" altLang="en-US" sz="1400">
               <a:latin typeface="Times New Roman" panose="02020603050405020304" pitchFamily="18" charset="0"/>
@@ -27454,7 +27454,7 @@
                 <a:ea typeface="Google Sans Text"/>
                 <a:cs typeface="Times New Roman" panose="02020603050405020304" pitchFamily="18" charset="0"/>
               </a:rPr>
-              <a:t>Детрилирование:</a:t>
+              <a:t>Детритилирование:</a:t>
             </a:r>
             <a:r>
               <a:rPr>
@@ -27462,7 +27462,7 @@
                 <a:ea typeface="Google Sans Text"/>
                 <a:cs typeface="Times New Roman" panose="02020603050405020304" pitchFamily="18" charset="0"/>
               </a:rPr>
-              <a:t> Удаление защитной диметокситритильной (DMTO) группы кислотой (</a:t>
+              <a:t> Удаление защитной диметокситритильной (ДМТ) группы кислотой (</a:t>
             </a:r>
             <a:r>
               <a:rPr i="1">
@@ -27550,7 +27550,7 @@
                 <a:ea typeface="Google Sans Text"/>
                 <a:cs typeface="Times New Roman" panose="02020603050405020304" pitchFamily="18" charset="0"/>
               </a:rPr>
-              <a:t>Кэппинг (блокирование):</a:t>
+              <a:t>Кэпирование (блокирование):</a:t>
             </a:r>
             <a:r>
               <a:rPr>
@@ -28794,7 +28794,7 @@
                 <a:ea typeface="Merriweather"/>
                 <a:cs typeface="Times New Roman" panose="02020603050405020304" pitchFamily="18" charset="0"/>
               </a:rPr>
-              <a:t>Механизм детрилирования</a:t>
+              <a:t>Механизм детритилирования</a:t>
             </a:r>
             <a:endParaRPr sz="2400" b="1" i="0">
               <a:solidFill>
@@ -28837,7 +28837,7 @@
                 <a:ea typeface="DM Sans"/>
                 <a:cs typeface="Times New Roman" panose="02020603050405020304" pitchFamily="18" charset="0"/>
               </a:rPr>
-              <a:t>Первая стадия цикла — удаление защитной DMT-группы (4,4'-диметокситритил) для активации 5'-OH конца.</a:t>
+              <a:t>Первая стадия цикла — удаление защитной ДМТ-группы (4,4'-диметокситритил) для активации 5'-OH конца.</a:t>
             </a:r>
             <a:endParaRPr b="0" i="0">
               <a:solidFill>
